--- a/inbox/Application Aware Networking/Vol_IX_Book_00_FedAAN_Day2_Operations_Overview.pptx
+++ b/inbox/Application Aware Networking/Vol_IX_Book_00_FedAAN_Day2_Operations_Overview.pptx
@@ -5846,7 +5846,7 @@
                 </a:solidFill>
                 <a:latin typeface="Arial"/>
               </a:rPr>
-              <a:t>Five books across the day-2 surface</a:t>
+              <a:t>Four books across the day-2 surface</a:t>
             </a:r>
           </a:p>
         </p:txBody>

--- a/inbox/Application Aware Networking/Vol_IX_Book_00_FedAAN_Day2_Operations_Overview.pptx
+++ b/inbox/Application Aware Networking/Vol_IX_Book_00_FedAAN_Day2_Operations_Overview.pptx
@@ -5846,7 +5846,7 @@
                 </a:solidFill>
                 <a:latin typeface="Arial"/>
               </a:rPr>
-              <a:t>Four books across the day-2 surface</a:t>
+              <a:t>Five books across the day-2 surface</a:t>
             </a:r>
           </a:p>
         </p:txBody>
@@ -5944,7 +5944,7 @@
                 <a:gridCol w="2743200"/>
                 <a:gridCol w="2743200"/>
               </a:tblGrid>
-              <a:tr h="548640">
+              <a:tr h="457200">
                 <a:tc>
                   <a:txBody>
                     <a:bodyPr/>
@@ -6012,7 +6012,7 @@
                   </a:tcPr>
                 </a:tc>
               </a:tr>
-              <a:tr h="548640">
+              <a:tr h="457200">
                 <a:tc>
                   <a:txBody>
                     <a:bodyPr/>
@@ -6080,7 +6080,7 @@
                   </a:tcPr>
                 </a:tc>
               </a:tr>
-              <a:tr h="548640">
+              <a:tr h="457200">
                 <a:tc>
                   <a:txBody>
                     <a:bodyPr/>
@@ -6148,7 +6148,7 @@
                   </a:tcPr>
                 </a:tc>
               </a:tr>
-              <a:tr h="548640">
+              <a:tr h="457200">
                 <a:tc>
                   <a:txBody>
                     <a:bodyPr/>
@@ -6216,7 +6216,7 @@
                   </a:tcPr>
                 </a:tc>
               </a:tr>
-              <a:tr h="548640">
+              <a:tr h="457200">
                 <a:tc>
                   <a:txBody>
                     <a:bodyPr/>
@@ -6274,6 +6274,74 @@
                           <a:latin typeface="Arial"/>
                         </a:rPr>
                         <a:t>§4 · #1141</a:t>
+                      </a:r>
+                    </a:p>
+                  </a:txBody>
+                  <a:tcPr anchor="ctr">
+                    <a:solidFill>
+                      <a:srgbClr val="FFFFFF"/>
+                    </a:solidFill>
+                  </a:tcPr>
+                </a:tc>
+              </a:tr>
+              <a:tr h="457200">
+                <a:tc>
+                  <a:txBody>
+                    <a:bodyPr/>
+                    <a:lstStyle/>
+                    <a:p>
+                      <a:r>
+                        <a:rPr sz="900" b="1">
+                          <a:solidFill>
+                            <a:srgbClr val="1F3A5F"/>
+                          </a:solidFill>
+                          <a:latin typeface="Arial"/>
+                        </a:rPr>
+                        <a:t>IX-05</a:t>
+                      </a:r>
+                    </a:p>
+                  </a:txBody>
+                  <a:tcPr anchor="ctr">
+                    <a:solidFill>
+                      <a:srgbClr val="FFFFFF"/>
+                    </a:solidFill>
+                  </a:tcPr>
+                </a:tc>
+                <a:tc>
+                  <a:txBody>
+                    <a:bodyPr/>
+                    <a:lstStyle/>
+                    <a:p>
+                      <a:r>
+                        <a:rPr sz="900">
+                          <a:solidFill>
+                            <a:srgbClr val="1E293B"/>
+                          </a:solidFill>
+                          <a:latin typeface="Arial"/>
+                        </a:rPr>
+                        <a:t>SaaS integration governance — Entra gallery as an SA-9 event (Lane F)</a:t>
+                      </a:r>
+                    </a:p>
+                  </a:txBody>
+                  <a:tcPr anchor="ctr">
+                    <a:solidFill>
+                      <a:srgbClr val="FFFFFF"/>
+                    </a:solidFill>
+                  </a:tcPr>
+                </a:tc>
+                <a:tc>
+                  <a:txBody>
+                    <a:bodyPr/>
+                    <a:lstStyle/>
+                    <a:p>
+                      <a:r>
+                        <a:rPr sz="900">
+                          <a:solidFill>
+                            <a:srgbClr val="1E293B"/>
+                          </a:solidFill>
+                          <a:latin typeface="Arial"/>
+                        </a:rPr>
+                        <a:t>Operate</a:t>
                       </a:r>
                     </a:p>
                   </a:txBody>
